--- a/SqlSaturday628/SqlSat628-DbReporter.pptx
+++ b/SqlSaturday628/SqlSat628-DbReporter.pptx
@@ -7,6 +7,9 @@
   <p:notesMasterIdLst>
     <p:notesMasterId r:id="rId9"/>
   </p:notesMasterIdLst>
+  <p:handoutMasterIdLst>
+    <p:handoutMasterId r:id="rId10"/>
+  </p:handoutMasterIdLst>
   <p:sldIdLst>
     <p:sldId id="263" r:id="rId2"/>
     <p:sldId id="257" r:id="rId3"/>
@@ -17,7 +20,7 @@
     <p:sldId id="270" r:id="rId8"/>
   </p:sldIdLst>
   <p:sldSz cx="11520488" cy="6480175"/>
-  <p:notesSz cx="6858000" cy="9144000"/>
+  <p:notesSz cx="8891588" cy="6858000"/>
   <p:defaultTextStyle>
     <a:defPPr>
       <a:defRPr lang="en-US"/>
@@ -132,6 +135,171 @@
 </p:presentation>
 </file>
 
+<file path=ppt/handoutMasters/handoutMaster1.xml><?xml version="1.0" encoding="utf-8"?>
+<p:handoutMaster xmlns:a="http://schemas.openxmlformats.org/drawingml/2006/main" xmlns:r="http://schemas.openxmlformats.org/officeDocument/2006/relationships" xmlns:p="http://schemas.openxmlformats.org/presentationml/2006/main">
+  <p:cSld>
+    <p:bg>
+      <p:bgRef idx="1001">
+        <a:schemeClr val="bg1"/>
+      </p:bgRef>
+    </p:bg>
+    <p:spTree>
+      <p:nvGrpSpPr>
+        <p:cNvPr id="1" name=""/>
+        <p:cNvGrpSpPr/>
+        <p:nvPr/>
+      </p:nvGrpSpPr>
+      <p:grpSpPr>
+        <a:xfrm>
+          <a:off x="0" y="0"/>
+          <a:ext cx="0" cy="0"/>
+          <a:chOff x="0" y="0"/>
+          <a:chExt cx="0" cy="0"/>
+        </a:xfrm>
+      </p:grpSpPr>
+      <p:sp>
+        <p:nvSpPr>
+          <p:cNvPr id="2" name="Header Placeholder 1"/>
+          <p:cNvSpPr>
+            <a:spLocks noGrp="1"/>
+          </p:cNvSpPr>
+          <p:nvPr>
+            <p:ph type="hdr" sz="quarter"/>
+          </p:nvPr>
+        </p:nvSpPr>
+        <p:spPr>
+          <a:xfrm>
+            <a:off x="0" y="3"/>
+            <a:ext cx="3853021" cy="344091"/>
+          </a:xfrm>
+          <a:prstGeom prst="rect">
+            <a:avLst/>
+          </a:prstGeom>
+        </p:spPr>
+        <p:txBody>
+          <a:bodyPr vert="horz" lIns="91440" tIns="45720" rIns="91440" bIns="45720" rtlCol="0"/>
+          <a:lstStyle>
+            <a:lvl1pPr algn="l">
+              <a:defRPr sz="1200"/>
+            </a:lvl1pPr>
+          </a:lstStyle>
+          <a:p>
+            <a:endParaRPr lang="en-US"/>
+          </a:p>
+        </p:txBody>
+      </p:sp>
+      <p:sp>
+        <p:nvSpPr>
+          <p:cNvPr id="3" name="Date Placeholder 2"/>
+          <p:cNvSpPr>
+            <a:spLocks noGrp="1"/>
+          </p:cNvSpPr>
+          <p:nvPr>
+            <p:ph type="dt" sz="quarter" idx="1"/>
+          </p:nvPr>
+        </p:nvSpPr>
+        <p:spPr>
+          <a:xfrm>
+            <a:off x="5036509" y="3"/>
+            <a:ext cx="3853021" cy="344091"/>
+          </a:xfrm>
+          <a:prstGeom prst="rect">
+            <a:avLst/>
+          </a:prstGeom>
+        </p:spPr>
+        <p:txBody>
+          <a:bodyPr vert="horz" lIns="91440" tIns="45720" rIns="91440" bIns="45720" rtlCol="0"/>
+          <a:lstStyle>
+            <a:lvl1pPr algn="r">
+              <a:defRPr sz="1200"/>
+            </a:lvl1pPr>
+          </a:lstStyle>
+          <a:p>
+            <a:fld id="{43DDB8B7-3180-4D5E-B368-9607162A4734}" type="datetimeFigureOut">
+              <a:rPr lang="en-US" smtClean="0"/>
+              <a:t>7/28/2017</a:t>
+            </a:fld>
+            <a:endParaRPr lang="en-US"/>
+          </a:p>
+        </p:txBody>
+      </p:sp>
+      <p:sp>
+        <p:nvSpPr>
+          <p:cNvPr id="4" name="Footer Placeholder 3"/>
+          <p:cNvSpPr>
+            <a:spLocks noGrp="1"/>
+          </p:cNvSpPr>
+          <p:nvPr>
+            <p:ph type="ftr" sz="quarter" idx="2"/>
+          </p:nvPr>
+        </p:nvSpPr>
+        <p:spPr>
+          <a:xfrm>
+            <a:off x="0" y="6513910"/>
+            <a:ext cx="3853021" cy="344090"/>
+          </a:xfrm>
+          <a:prstGeom prst="rect">
+            <a:avLst/>
+          </a:prstGeom>
+        </p:spPr>
+        <p:txBody>
+          <a:bodyPr vert="horz" lIns="91440" tIns="45720" rIns="91440" bIns="45720" rtlCol="0" anchor="b"/>
+          <a:lstStyle>
+            <a:lvl1pPr algn="l">
+              <a:defRPr sz="1200"/>
+            </a:lvl1pPr>
+          </a:lstStyle>
+          <a:p>
+            <a:endParaRPr lang="en-US"/>
+          </a:p>
+        </p:txBody>
+      </p:sp>
+      <p:sp>
+        <p:nvSpPr>
+          <p:cNvPr id="5" name="Slide Number Placeholder 4"/>
+          <p:cNvSpPr>
+            <a:spLocks noGrp="1"/>
+          </p:cNvSpPr>
+          <p:nvPr>
+            <p:ph type="sldNum" sz="quarter" idx="3"/>
+          </p:nvPr>
+        </p:nvSpPr>
+        <p:spPr>
+          <a:xfrm>
+            <a:off x="5036509" y="6513910"/>
+            <a:ext cx="3853021" cy="344090"/>
+          </a:xfrm>
+          <a:prstGeom prst="rect">
+            <a:avLst/>
+          </a:prstGeom>
+        </p:spPr>
+        <p:txBody>
+          <a:bodyPr vert="horz" lIns="91440" tIns="45720" rIns="91440" bIns="45720" rtlCol="0" anchor="b"/>
+          <a:lstStyle>
+            <a:lvl1pPr algn="r">
+              <a:defRPr sz="1200"/>
+            </a:lvl1pPr>
+          </a:lstStyle>
+          <a:p>
+            <a:fld id="{1D01BB17-A8F7-4575-A2D8-96583EC73526}" type="slidenum">
+              <a:rPr lang="en-US" smtClean="0"/>
+              <a:t>‹#›</a:t>
+            </a:fld>
+            <a:endParaRPr lang="en-US"/>
+          </a:p>
+        </p:txBody>
+      </p:sp>
+    </p:spTree>
+    <p:extLst>
+      <p:ext uri="{BB962C8B-B14F-4D97-AF65-F5344CB8AC3E}">
+        <p14:creationId xmlns:p14="http://schemas.microsoft.com/office/powerpoint/2010/main" val="1420062186"/>
+      </p:ext>
+    </p:extLst>
+  </p:cSld>
+  <p:clrMap bg1="lt1" tx1="dk1" bg2="lt2" tx2="dk2" accent1="accent1" accent2="accent2" accent3="accent3" accent4="accent4" accent5="accent5" accent6="accent6" hlink="hlink" folHlink="folHlink"/>
+</p:handoutMaster>
+</file>
+
 <file path=ppt/notesMasters/notesMaster1.xml><?xml version="1.0" encoding="utf-8"?>
 <p:notesMaster xmlns:a="http://schemas.openxmlformats.org/drawingml/2006/main" xmlns:r="http://schemas.openxmlformats.org/officeDocument/2006/relationships" xmlns:p="http://schemas.openxmlformats.org/presentationml/2006/main">
   <p:cSld>
@@ -166,8 +334,8 @@
         </p:nvSpPr>
         <p:spPr>
           <a:xfrm>
-            <a:off x="0" y="0"/>
-            <a:ext cx="2971800" cy="458788"/>
+            <a:off x="0" y="3"/>
+            <a:ext cx="3853021" cy="344091"/>
           </a:xfrm>
           <a:prstGeom prst="rect">
             <a:avLst/>
@@ -197,8 +365,8 @@
         </p:nvSpPr>
         <p:spPr>
           <a:xfrm>
-            <a:off x="3884613" y="0"/>
-            <a:ext cx="2971800" cy="458788"/>
+            <a:off x="5036509" y="3"/>
+            <a:ext cx="3853021" cy="344091"/>
           </a:xfrm>
           <a:prstGeom prst="rect">
             <a:avLst/>
@@ -232,8 +400,8 @@
         </p:nvSpPr>
         <p:spPr>
           <a:xfrm>
-            <a:off x="685800" y="1143000"/>
-            <a:ext cx="5486400" cy="3086100"/>
+            <a:off x="2389188" y="857250"/>
+            <a:ext cx="4113212" cy="2314575"/>
           </a:xfrm>
           <a:prstGeom prst="rect">
             <a:avLst/>
@@ -265,8 +433,8 @@
         </p:nvSpPr>
         <p:spPr>
           <a:xfrm>
-            <a:off x="685800" y="4400550"/>
-            <a:ext cx="5486400" cy="3600450"/>
+            <a:off x="889159" y="3300412"/>
+            <a:ext cx="7113270" cy="2700338"/>
           </a:xfrm>
           <a:prstGeom prst="rect">
             <a:avLst/>
@@ -325,8 +493,8 @@
         </p:nvSpPr>
         <p:spPr>
           <a:xfrm>
-            <a:off x="0" y="8685213"/>
-            <a:ext cx="2971800" cy="458787"/>
+            <a:off x="0" y="6513910"/>
+            <a:ext cx="3853021" cy="344090"/>
           </a:xfrm>
           <a:prstGeom prst="rect">
             <a:avLst/>
@@ -356,8 +524,8 @@
         </p:nvSpPr>
         <p:spPr>
           <a:xfrm>
-            <a:off x="3884613" y="8685213"/>
-            <a:ext cx="2971800" cy="458787"/>
+            <a:off x="5036509" y="6513910"/>
+            <a:ext cx="3853021" cy="344090"/>
           </a:xfrm>
           <a:prstGeom prst="rect">
             <a:avLst/>
@@ -538,21 +706,13 @@
           <a:p>
             <a:r>
               <a:rPr lang="en-US" baseline="0" dirty="0" smtClean="0"/>
-              <a:t>  * PowerShell’s </a:t>
-            </a:r>
+              <a:t>  * PowerShell’s not the only way to do this</a:t>
+            </a:r>
+          </a:p>
+          <a:p>
             <a:r>
               <a:rPr lang="en-US" baseline="0" dirty="0" smtClean="0"/>
-              <a:t>not the only way to do this</a:t>
-            </a:r>
-          </a:p>
-          <a:p>
-            <a:r>
-              <a:rPr lang="en-US" baseline="0" dirty="0" smtClean="0"/>
-              <a:t>  * Using </a:t>
-            </a:r>
-            <a:r>
-              <a:rPr lang="en-US" baseline="0" dirty="0" smtClean="0"/>
-              <a:t>an established environment like this to return results means lots and lots of utilities that are already made get to help you with your data</a:t>
+              <a:t>  * Using an established environment like this to return results means lots and lots of utilities that are already made get to help you with your data</a:t>
             </a:r>
           </a:p>
           <a:p>
@@ -563,7 +723,6 @@
               <a:rPr lang="en-US" baseline="0" dirty="0" smtClean="0"/>
               <a:t>Warning about PS remoting/constrained endpoint: It would take a lot of work to consider this a security boundary. I trust the PowerShell components to do their job and keep everything secure, but the DB reader parts need a lot of work to make sure there are no SQL or PS code injection points for end users of the final commands. The intent is to get the module down to where there are no injection points, but even when that’s done, I wouldn’t even begin to try to guarantee that the commands are secure. This doesn’t matter so much when you trust your end users to be able to see the connection string and to run the commands in their own context (who needs to inject code when you can just run it as yourself)</a:t>
             </a:r>
-            <a:endParaRPr lang="en-US" baseline="0" dirty="0" smtClean="0"/>
           </a:p>
         </p:txBody>
       </p:sp>
@@ -1821,7 +1980,7 @@
           <a:graphicData uri="http://schemas.openxmlformats.org/presentationml/2006/ole">
             <mc:AlternateContent xmlns:mc="http://schemas.openxmlformats.org/markup-compatibility/2006">
               <mc:Choice xmlns:v="urn:schemas-microsoft-com:vml" Requires="v">
-                <p:oleObj spid="_x0000_s1036" name="Image" r:id="rId10" imgW="2279520" imgH="1310400" progId="Photoshop.Image.18">
+                <p:oleObj spid="_x0000_s1038" name="Image" r:id="rId10" imgW="2279520" imgH="1310400" progId="Photoshop.Image.18">
                   <p:embed/>
                 </p:oleObj>
               </mc:Choice>
@@ -3928,11 +4087,7 @@
             </a:pPr>
             <a:r>
               <a:rPr lang="en-US" dirty="0" smtClean="0"/>
-              <a:t>Allows command creation with almost no PowerShell </a:t>
-            </a:r>
-            <a:r>
-              <a:rPr lang="en-US" dirty="0" smtClean="0"/>
-              <a:t>code</a:t>
+              <a:t>Allows command creation with almost no PowerShell code</a:t>
             </a:r>
           </a:p>
           <a:p>
@@ -3958,7 +4113,6 @@
               <a:rPr lang="en-US" dirty="0" smtClean="0"/>
               <a:t> .NET interface (SQL Server has this)</a:t>
             </a:r>
-            <a:endParaRPr lang="en-US" dirty="0" smtClean="0"/>
           </a:p>
           <a:p>
             <a:pPr marL="1147527" lvl="1" indent="-571500">
@@ -3969,7 +4123,6 @@
               <a:rPr lang="en-US" dirty="0" smtClean="0"/>
               <a:t>Valid connection string to connect to DB</a:t>
             </a:r>
-            <a:endParaRPr lang="en-US" dirty="0" smtClean="0"/>
           </a:p>
           <a:p>
             <a:pPr marL="1147527" lvl="1" indent="-571500">
@@ -3990,7 +4143,6 @@
               <a:rPr lang="en-US" dirty="0" smtClean="0"/>
               <a:t>Boilerplate command syntax</a:t>
             </a:r>
-            <a:endParaRPr lang="en-US" dirty="0" smtClean="0"/>
           </a:p>
           <a:p>
             <a:pPr marL="571500" indent="-571500">
@@ -4635,8 +4787,15 @@
             </a:br>
             <a:r>
               <a:rPr lang="en-US" sz="2400" dirty="0" smtClean="0"/>
-              <a:t>Demo code can be found here: </a:t>
-            </a:r>
+              <a:t>Demo code can be found here</a:t>
+            </a:r>
+            <a:r>
+              <a:rPr lang="en-US" sz="2400" dirty="0" smtClean="0"/>
+              <a:t>:</a:t>
+            </a:r>
+            <a:br>
+              <a:rPr lang="en-US" sz="2400" dirty="0" smtClean="0"/>
+            </a:br>
             <a:r>
               <a:rPr lang="en-US" sz="2400" dirty="0" smtClean="0"/>
               <a:t>github.com/</a:t>
@@ -4646,8 +4805,8 @@
               <a:t>rohnedwards</a:t>
             </a:r>
             <a:r>
-              <a:rPr lang="en-US" sz="2400" smtClean="0"/>
-              <a:t>/Presentations/SqlSaturday628</a:t>
+              <a:rPr lang="en-US" sz="2400" dirty="0" smtClean="0"/>
+              <a:t>/Presentations/</a:t>
             </a:r>
             <a:endParaRPr lang="en-US" sz="2400" dirty="0"/>
           </a:p>
@@ -4856,7 +5015,6 @@
               <a:rPr lang="en-US" dirty="0" smtClean="0"/>
               <a:t>	</a:t>
             </a:r>
-            <a:endParaRPr lang="en-US" dirty="0" smtClean="0"/>
           </a:p>
           <a:p>
             <a:pPr marL="571500" indent="-571500">
@@ -5462,4 +5620,265 @@
     </a:ext>
   </a:extLst>
 </a:theme>
+</file>
+
+<file path=ppt/theme/theme3.xml><?xml version="1.0" encoding="utf-8"?>
+<a:theme xmlns:a="http://schemas.openxmlformats.org/drawingml/2006/main" name="Office Theme">
+  <a:themeElements>
+    <a:clrScheme name="Office">
+      <a:dk1>
+        <a:sysClr val="windowText" lastClr="000000"/>
+      </a:dk1>
+      <a:lt1>
+        <a:sysClr val="window" lastClr="FFFFFF"/>
+      </a:lt1>
+      <a:dk2>
+        <a:srgbClr val="44546A"/>
+      </a:dk2>
+      <a:lt2>
+        <a:srgbClr val="E7E6E6"/>
+      </a:lt2>
+      <a:accent1>
+        <a:srgbClr val="5B9BD5"/>
+      </a:accent1>
+      <a:accent2>
+        <a:srgbClr val="ED7D31"/>
+      </a:accent2>
+      <a:accent3>
+        <a:srgbClr val="A5A5A5"/>
+      </a:accent3>
+      <a:accent4>
+        <a:srgbClr val="FFC000"/>
+      </a:accent4>
+      <a:accent5>
+        <a:srgbClr val="4472C4"/>
+      </a:accent5>
+      <a:accent6>
+        <a:srgbClr val="70AD47"/>
+      </a:accent6>
+      <a:hlink>
+        <a:srgbClr val="0563C1"/>
+      </a:hlink>
+      <a:folHlink>
+        <a:srgbClr val="954F72"/>
+      </a:folHlink>
+    </a:clrScheme>
+    <a:fontScheme name="Office">
+      <a:majorFont>
+        <a:latin typeface="Calibri Light" panose="020F0302020204030204"/>
+        <a:ea typeface=""/>
+        <a:cs typeface=""/>
+        <a:font script="Jpan" typeface="ＭＳ Ｐゴシック"/>
+        <a:font script="Hang" typeface="맑은 고딕"/>
+        <a:font script="Hans" typeface="宋体"/>
+        <a:font script="Hant" typeface="新細明體"/>
+        <a:font script="Arab" typeface="Times New Roman"/>
+        <a:font script="Hebr" typeface="Times New Roman"/>
+        <a:font script="Thai" typeface="Angsana New"/>
+        <a:font script="Ethi" typeface="Nyala"/>
+        <a:font script="Beng" typeface="Vrinda"/>
+        <a:font script="Gujr" typeface="Shruti"/>
+        <a:font script="Khmr" typeface="MoolBoran"/>
+        <a:font script="Knda" typeface="Tunga"/>
+        <a:font script="Guru" typeface="Raavi"/>
+        <a:font script="Cans" typeface="Euphemia"/>
+        <a:font script="Cher" typeface="Plantagenet Cherokee"/>
+        <a:font script="Yiii" typeface="Microsoft Yi Baiti"/>
+        <a:font script="Tibt" typeface="Microsoft Himalaya"/>
+        <a:font script="Thaa" typeface="MV Boli"/>
+        <a:font script="Deva" typeface="Mangal"/>
+        <a:font script="Telu" typeface="Gautami"/>
+        <a:font script="Taml" typeface="Latha"/>
+        <a:font script="Syrc" typeface="Estrangelo Edessa"/>
+        <a:font script="Orya" typeface="Kalinga"/>
+        <a:font script="Mlym" typeface="Kartika"/>
+        <a:font script="Laoo" typeface="DokChampa"/>
+        <a:font script="Sinh" typeface="Iskoola Pota"/>
+        <a:font script="Mong" typeface="Mongolian Baiti"/>
+        <a:font script="Viet" typeface="Times New Roman"/>
+        <a:font script="Uigh" typeface="Microsoft Uighur"/>
+        <a:font script="Geor" typeface="Sylfaen"/>
+      </a:majorFont>
+      <a:minorFont>
+        <a:latin typeface="Calibri" panose="020F0502020204030204"/>
+        <a:ea typeface=""/>
+        <a:cs typeface=""/>
+        <a:font script="Jpan" typeface="ＭＳ Ｐゴシック"/>
+        <a:font script="Hang" typeface="맑은 고딕"/>
+        <a:font script="Hans" typeface="宋体"/>
+        <a:font script="Hant" typeface="新細明體"/>
+        <a:font script="Arab" typeface="Arial"/>
+        <a:font script="Hebr" typeface="Arial"/>
+        <a:font script="Thai" typeface="Cordia New"/>
+        <a:font script="Ethi" typeface="Nyala"/>
+        <a:font script="Beng" typeface="Vrinda"/>
+        <a:font script="Gujr" typeface="Shruti"/>
+        <a:font script="Khmr" typeface="DaunPenh"/>
+        <a:font script="Knda" typeface="Tunga"/>
+        <a:font script="Guru" typeface="Raavi"/>
+        <a:font script="Cans" typeface="Euphemia"/>
+        <a:font script="Cher" typeface="Plantagenet Cherokee"/>
+        <a:font script="Yiii" typeface="Microsoft Yi Baiti"/>
+        <a:font script="Tibt" typeface="Microsoft Himalaya"/>
+        <a:font script="Thaa" typeface="MV Boli"/>
+        <a:font script="Deva" typeface="Mangal"/>
+        <a:font script="Telu" typeface="Gautami"/>
+        <a:font script="Taml" typeface="Latha"/>
+        <a:font script="Syrc" typeface="Estrangelo Edessa"/>
+        <a:font script="Orya" typeface="Kalinga"/>
+        <a:font script="Mlym" typeface="Kartika"/>
+        <a:font script="Laoo" typeface="DokChampa"/>
+        <a:font script="Sinh" typeface="Iskoola Pota"/>
+        <a:font script="Mong" typeface="Mongolian Baiti"/>
+        <a:font script="Viet" typeface="Arial"/>
+        <a:font script="Uigh" typeface="Microsoft Uighur"/>
+        <a:font script="Geor" typeface="Sylfaen"/>
+      </a:minorFont>
+    </a:fontScheme>
+    <a:fmtScheme name="Office">
+      <a:fillStyleLst>
+        <a:solidFill>
+          <a:schemeClr val="phClr"/>
+        </a:solidFill>
+        <a:gradFill rotWithShape="1">
+          <a:gsLst>
+            <a:gs pos="0">
+              <a:schemeClr val="phClr">
+                <a:lumMod val="110000"/>
+                <a:satMod val="105000"/>
+                <a:tint val="67000"/>
+              </a:schemeClr>
+            </a:gs>
+            <a:gs pos="50000">
+              <a:schemeClr val="phClr">
+                <a:lumMod val="105000"/>
+                <a:satMod val="103000"/>
+                <a:tint val="73000"/>
+              </a:schemeClr>
+            </a:gs>
+            <a:gs pos="100000">
+              <a:schemeClr val="phClr">
+                <a:lumMod val="105000"/>
+                <a:satMod val="109000"/>
+                <a:tint val="81000"/>
+              </a:schemeClr>
+            </a:gs>
+          </a:gsLst>
+          <a:lin ang="5400000" scaled="0"/>
+        </a:gradFill>
+        <a:gradFill rotWithShape="1">
+          <a:gsLst>
+            <a:gs pos="0">
+              <a:schemeClr val="phClr">
+                <a:satMod val="103000"/>
+                <a:lumMod val="102000"/>
+                <a:tint val="94000"/>
+              </a:schemeClr>
+            </a:gs>
+            <a:gs pos="50000">
+              <a:schemeClr val="phClr">
+                <a:satMod val="110000"/>
+                <a:lumMod val="100000"/>
+                <a:shade val="100000"/>
+              </a:schemeClr>
+            </a:gs>
+            <a:gs pos="100000">
+              <a:schemeClr val="phClr">
+                <a:lumMod val="99000"/>
+                <a:satMod val="120000"/>
+                <a:shade val="78000"/>
+              </a:schemeClr>
+            </a:gs>
+          </a:gsLst>
+          <a:lin ang="5400000" scaled="0"/>
+        </a:gradFill>
+      </a:fillStyleLst>
+      <a:lnStyleLst>
+        <a:ln w="6350" cap="flat" cmpd="sng" algn="ctr">
+          <a:solidFill>
+            <a:schemeClr val="phClr"/>
+          </a:solidFill>
+          <a:prstDash val="solid"/>
+          <a:miter lim="800000"/>
+        </a:ln>
+        <a:ln w="12700" cap="flat" cmpd="sng" algn="ctr">
+          <a:solidFill>
+            <a:schemeClr val="phClr"/>
+          </a:solidFill>
+          <a:prstDash val="solid"/>
+          <a:miter lim="800000"/>
+        </a:ln>
+        <a:ln w="19050" cap="flat" cmpd="sng" algn="ctr">
+          <a:solidFill>
+            <a:schemeClr val="phClr"/>
+          </a:solidFill>
+          <a:prstDash val="solid"/>
+          <a:miter lim="800000"/>
+        </a:ln>
+      </a:lnStyleLst>
+      <a:effectStyleLst>
+        <a:effectStyle>
+          <a:effectLst/>
+        </a:effectStyle>
+        <a:effectStyle>
+          <a:effectLst/>
+        </a:effectStyle>
+        <a:effectStyle>
+          <a:effectLst>
+            <a:outerShdw blurRad="57150" dist="19050" dir="5400000" algn="ctr" rotWithShape="0">
+              <a:srgbClr val="000000">
+                <a:alpha val="63000"/>
+              </a:srgbClr>
+            </a:outerShdw>
+          </a:effectLst>
+        </a:effectStyle>
+      </a:effectStyleLst>
+      <a:bgFillStyleLst>
+        <a:solidFill>
+          <a:schemeClr val="phClr"/>
+        </a:solidFill>
+        <a:solidFill>
+          <a:schemeClr val="phClr">
+            <a:tint val="95000"/>
+            <a:satMod val="170000"/>
+          </a:schemeClr>
+        </a:solidFill>
+        <a:gradFill rotWithShape="1">
+          <a:gsLst>
+            <a:gs pos="0">
+              <a:schemeClr val="phClr">
+                <a:tint val="93000"/>
+                <a:satMod val="150000"/>
+                <a:shade val="98000"/>
+                <a:lumMod val="102000"/>
+              </a:schemeClr>
+            </a:gs>
+            <a:gs pos="50000">
+              <a:schemeClr val="phClr">
+                <a:tint val="98000"/>
+                <a:satMod val="130000"/>
+                <a:shade val="90000"/>
+                <a:lumMod val="103000"/>
+              </a:schemeClr>
+            </a:gs>
+            <a:gs pos="100000">
+              <a:schemeClr val="phClr">
+                <a:shade val="63000"/>
+                <a:satMod val="120000"/>
+              </a:schemeClr>
+            </a:gs>
+          </a:gsLst>
+          <a:lin ang="5400000" scaled="0"/>
+        </a:gradFill>
+      </a:bgFillStyleLst>
+    </a:fmtScheme>
+  </a:themeElements>
+  <a:objectDefaults/>
+  <a:extraClrSchemeLst/>
+  <a:extLst>
+    <a:ext uri="{05A4C25C-085E-4340-85A3-A5531E510DB2}">
+      <thm15:themeFamily xmlns:thm15="http://schemas.microsoft.com/office/thememl/2012/main" name="Office Theme" id="{62F939B6-93AF-4DB8-9C6B-D6C7DFDC589F}" vid="{4A3C46E8-61CC-4603-A589-7422A47A8E4A}"/>
+    </a:ext>
+  </a:extLst>
+</a:theme>
 </file>